--- a/MusicQuery-Agent-答辩.pptx
+++ b/MusicQuery-Agent-答辩.pptx
@@ -137,7 +137,7 @@
               <c:strCache>
                 <c:ptCount val="1"/>
                 <c:pt idx="0">
-                  <c:v>均匀随机分布</c:v>
+                  <c:v>均匀随机分布（示意）</c:v>
                 </c:pt>
               </c:strCache>
             </c:strRef>
@@ -232,7 +232,7 @@
               <c:strCache>
                 <c:ptCount val="1"/>
                 <c:pt idx="0">
-                  <c:v>对数正态热度分布</c:v>
+                  <c:v>对数正态热度分布（真实曲库实测）</c:v>
                 </c:pt>
               </c:strCache>
             </c:strRef>
@@ -300,19 +300,19 @@
                 <c:formatCode>General</c:formatCode>
                 <c:ptCount val="5"/>
                 <c:pt idx="0">
-                  <c:v>194</c:v>
+                  <c:v>132</c:v>
                 </c:pt>
                 <c:pt idx="1">
-                  <c:v>160</c:v>
+                  <c:v>101</c:v>
                 </c:pt>
                 <c:pt idx="2">
-                  <c:v>130</c:v>
+                  <c:v>100</c:v>
                 </c:pt>
                 <c:pt idx="3">
-                  <c:v>112</c:v>
+                  <c:v>83</c:v>
                 </c:pt>
                 <c:pt idx="4">
-                  <c:v>106</c:v>
+                  <c:v>81</c:v>
                 </c:pt>
               </c:numCache>
             </c:numRef>
@@ -1584,7 +1584,7 @@
           <a:p>
             <a:r>
               <a:rPr lang="en-US" dirty="0"/>
-              <a:t>演示按由浅入深来：先来一个多表 JOIN 的播放量排名，再来一个 COUNT 聚合；然后演示两个特殊场景——问天气，会被意图判断礼貌拒绝；要求删除播放记录，会被黑名单拦截，并且能在侧边栏历史里看到这条 is_success 为 0 的记录。左边是界面布局：下方三块分别展示生成的 SQL、结果表格和自然语言回答，右侧是运行状态和历史。为了防止教室网络问题，我准备了手机热点和一组成功截图做兜底。</a:t>
+              <a:t>演示按由浅入深来：先演示流派筛选——选摇滚再问播放量前五，筛选条件直接写进 SQL；再只输入周杰伦三个字，光杆歌手名也能默认查出他的歌；然后演示两个特殊场景——问天气，会被意图判断礼貌拒绝；要求删除播放记录，会被黑名单拦截，并且能在侧边栏历史里看到这条 is_success 为 0 的记录，历史还支持单条删除与清空。左边是界面布局：下方三块分别展示生成的 SQL、结果表格和自然语言回答，右侧是运行状态和历史。为了防止教室网络问题，我准备了手机热点和一组成功截图做兜底。</a:t>
             </a:r>
             <a:endParaRPr lang="en-US" dirty="0"/>
           </a:p>
@@ -1672,7 +1672,7 @@
           <a:p>
             <a:r>
               <a:rPr lang="en-US" dirty="0"/>
-              <a:t>这页讲数据设计的一个亮点。最初的测试数据是完全均匀随机生成的，五百首歌分五千次播放，每首平均十次，前五名全都挤在二十次左右并列——排名本身没有信息量。真实音乐产品的播放量是长尾的：少数爆款占大头，大量歌曲只有个位数播放。所以我改用对数正态分布模拟热度，头部歌曲将近两百次，长尾歌曲个位数。注意数据量仍然是任务书要求的 5000 条，我们改的只是分布，不是数量。</a:t>
+              <a:t>这页讲数据设计的一个亮点。最初的测试数据是完全均匀随机生成的，五百首歌分五千次播放，每首平均十次，前五名全都挤在二十次左右并列——排名本身没有信息量。真实音乐产品的播放量是长尾的：少数爆款占大头，大量歌曲只有个位数播放。所以我们改用对数正态分布模拟热度，现在曲库换成了真实公开数据，头部是 BTS 的《Euphoria》132 次，长尾歌曲个位数。播放行为属于隐私数据无法获得真实日志，按真实统计规律仿真——这一点照实说明反而显得专业。数据量仍是任务书要求的 5000 条。</a:t>
             </a:r>
             <a:endParaRPr lang="en-US" dirty="0"/>
           </a:p>
@@ -2157,9 +2157,33 @@
           <a:ln/>
         </p:spPr>
       </p:sp>
-      <p:sp>
-        <p:nvSpPr>
-          <p:cNvPr id="7" name="Text 5"/>
+      <p:pic>
+        <p:nvPicPr>
+          <p:cNvPr id="7" name="Image 0" descr="E:/musicquery-agent/logo/logo-icon-512.png">    </p:cNvPr>
+          <p:cNvPicPr>
+            <a:picLocks noChangeAspect="1"/>
+          </p:cNvPicPr>
+          <p:nvPr/>
+        </p:nvPicPr>
+        <p:blipFill>
+          <a:blip r:embed="rId1"/>
+          <a:stretch>
+            <a:fillRect/>
+          </a:stretch>
+        </p:blipFill>
+        <p:spPr>
+          <a:xfrm>
+            <a:off x="8709660" y="2628900"/>
+            <a:ext cx="1600200" cy="1600200"/>
+          </a:xfrm>
+          <a:prstGeom prst="rect">
+            <a:avLst/>
+          </a:prstGeom>
+        </p:spPr>
+      </p:pic>
+      <p:sp>
+        <p:nvSpPr>
+          <p:cNvPr id="8" name="Text 5"/>
           <p:cNvSpPr/>
           <p:nvPr/>
         </p:nvSpPr>
@@ -2198,7 +2222,7 @@
       </p:sp>
       <p:sp>
         <p:nvSpPr>
-          <p:cNvPr id="8" name="Text 6"/>
+          <p:cNvPr id="9" name="Text 6"/>
           <p:cNvSpPr/>
           <p:nvPr/>
         </p:nvSpPr>
@@ -2237,7 +2261,7 @@
       </p:sp>
       <p:sp>
         <p:nvSpPr>
-          <p:cNvPr id="9" name="Text 7"/>
+          <p:cNvPr id="10" name="Text 7"/>
           <p:cNvSpPr/>
           <p:nvPr/>
         </p:nvSpPr>
@@ -2299,7 +2323,7 @@
       </p:sp>
       <p:sp>
         <p:nvSpPr>
-          <p:cNvPr id="10" name="Text 8"/>
+          <p:cNvPr id="11" name="Text 8"/>
           <p:cNvSpPr/>
           <p:nvPr/>
         </p:nvSpPr>
@@ -2352,7 +2376,7 @@
       </p:sp>
       <p:sp>
         <p:nvSpPr>
-          <p:cNvPr id="11" name="Text 9"/>
+          <p:cNvPr id="12" name="Text 9"/>
           <p:cNvSpPr/>
           <p:nvPr/>
         </p:nvSpPr>
@@ -4077,7 +4101,7 @@
                 <a:ea typeface="Microsoft YaHei" pitchFamily="34" charset="-122"/>
                 <a:cs typeface="Microsoft YaHei" pitchFamily="34" charset="-120"/>
               </a:rPr>
-              <a:t>Python 3.10+ · MySQL 8.4 · PyMySQL · Streamlit · 智谱 GLM-5.3-Flash</a:t>
+              <a:t>Python 3.10+ · MySQL 8.4 · PyMySQL · Streamlit · 智谱 GLM-4-Flash（免费档，OpenAI 兼容）</a:t>
             </a:r>
             <a:endParaRPr lang="en-US" sz="1450" dirty="0"/>
           </a:p>
@@ -7700,7 +7724,7 @@
                 <a:ea typeface="Microsoft YaHei" pitchFamily="34" charset="-122"/>
                 <a:cs typeface="Microsoft YaHei" pitchFamily="34" charset="-120"/>
               </a:rPr>
-              <a:t>，扫描行数 240</a:t>
+              <a:t>，扫描行数 3</a:t>
             </a:r>
             <a:endParaRPr lang="en-US" sz="1350" dirty="0"/>
           </a:p>
@@ -10594,7 +10618,7 @@
                 <a:ea typeface="Microsoft YaHei" pitchFamily="34" charset="-122"/>
                 <a:cs typeface="Microsoft YaHei" pitchFamily="34" charset="-120"/>
               </a:rPr>
-              <a:t>《一个人的烟火》以 194 次播放居首……</a:t>
+              <a:t>《Euphoria》以 132 次播放居首……</a:t>
             </a:r>
             <a:endParaRPr lang="en-US" sz="1200" dirty="0"/>
           </a:p>
@@ -10761,7 +10785,7 @@
                 <a:ea typeface="Microsoft YaHei" pitchFamily="34" charset="-122"/>
                 <a:cs typeface="Microsoft YaHei" pitchFamily="34" charset="-120"/>
               </a:rPr>
-              <a:t>“播放量最高的前 5 首歌？”</a:t>
+              <a:t>筛选「摇滚」+ 播放量最高前 5</a:t>
             </a:r>
             <a:endParaRPr lang="en-US" sz="1400" dirty="0"/>
           </a:p>
@@ -10781,7 +10805,7 @@
                 <a:ea typeface="Microsoft YaHei" pitchFamily="34" charset="-122"/>
                 <a:cs typeface="Microsoft YaHei" pitchFamily="34" charset="-120"/>
               </a:rPr>
-              <a:t>→ 三表 JOIN + ORDER BY + LIMIT</a:t>
+              <a:t>→ 流派筛选写入 SQL，JOIN 排序</a:t>
             </a:r>
             <a:endParaRPr lang="en-US" sz="1400" dirty="0"/>
           </a:p>
@@ -10823,7 +10847,7 @@
                 <a:ea typeface="Microsoft YaHei" pitchFamily="34" charset="-122"/>
                 <a:cs typeface="Microsoft YaHei" pitchFamily="34" charset="-120"/>
               </a:rPr>
-              <a:t>“一共有多少首流行歌曲？”</a:t>
+              <a:t>周杰伦的歌</a:t>
             </a:r>
             <a:endParaRPr lang="en-US" sz="1400" dirty="0"/>
           </a:p>
@@ -10843,7 +10867,7 @@
                 <a:ea typeface="Microsoft YaHei" pitchFamily="34" charset="-122"/>
                 <a:cs typeface="Microsoft YaHei" pitchFamily="34" charset="-120"/>
               </a:rPr>
-              <a:t>→ COUNT 聚合查询</a:t>
+              <a:t>→ 光杆歌手名默认查其歌曲</a:t>
             </a:r>
             <a:endParaRPr lang="en-US" sz="1400" dirty="0"/>
           </a:p>
@@ -10885,7 +10909,7 @@
                 <a:ea typeface="Microsoft YaHei" pitchFamily="34" charset="-122"/>
                 <a:cs typeface="Microsoft YaHei" pitchFamily="34" charset="-120"/>
               </a:rPr>
-              <a:t>“今天天气怎么样？”</a:t>
+              <a:t>今天天气怎么样？</a:t>
             </a:r>
             <a:endParaRPr lang="en-US" sz="1400" dirty="0"/>
           </a:p>
@@ -10947,7 +10971,7 @@
                 <a:ea typeface="Microsoft YaHei" pitchFamily="34" charset="-122"/>
                 <a:cs typeface="Microsoft YaHei" pitchFamily="34" charset="-120"/>
               </a:rPr>
-              <a:t>“删除所有播放记录”</a:t>
+              <a:t>删除所有播放记录</a:t>
             </a:r>
             <a:endParaRPr lang="en-US" sz="1400" dirty="0"/>
           </a:p>
@@ -11029,7 +11053,7 @@
                 <a:ea typeface="Microsoft YaHei" pitchFamily="34" charset="-122"/>
                 <a:cs typeface="Microsoft YaHei" pitchFamily="34" charset="-120"/>
               </a:rPr>
-              <a:t>→ 本次耗时、成功状态、历史可回溯</a:t>
+              <a:t>→ 耗时 / 状态 / 历史删除与清空</a:t>
             </a:r>
             <a:endParaRPr lang="en-US" sz="1400" dirty="0"/>
           </a:p>
@@ -11380,7 +11404,7 @@
                 <a:ea typeface="Microsoft YaHei" pitchFamily="34" charset="-122"/>
                 <a:cs typeface="Microsoft YaHei" pitchFamily="34" charset="-120"/>
               </a:rPr>
-              <a:t>对数正态热度：头部歌曲 194 次、长尾歌曲个位数，贴近真实产品</a:t>
+              <a:t>对数正态热度：头部《Euphoria》132 次、长尾歌曲个位数，贴近真实产品</a:t>
             </a:r>
             <a:endParaRPr lang="en-US" sz="1550" dirty="0"/>
           </a:p>
@@ -11422,7 +11446,7 @@
                 <a:ea typeface="Microsoft YaHei" pitchFamily="34" charset="-122"/>
                 <a:cs typeface="Microsoft YaHei" pitchFamily="34" charset="-120"/>
               </a:rPr>
-              <a:t>约束</a:t>
+              <a:t>数据</a:t>
             </a:r>
             <a:endParaRPr lang="en-US" sz="1550" dirty="0"/>
           </a:p>
@@ -11442,7 +11466,7 @@
                 <a:ea typeface="Microsoft YaHei" pitchFamily="34" charset="-122"/>
                 <a:cs typeface="Microsoft YaHei" pitchFamily="34" charset="-120"/>
               </a:rPr>
-              <a:t>数据量保持 5000 条（任务书要求）——只改分布，不改数量</a:t>
+              <a:t>曲库为真实公开数据（50 歌手/100 专辑/500 曲目）；播放行为按长尾规律仿真</a:t>
             </a:r>
             <a:endParaRPr lang="en-US" sz="1550" dirty="0"/>
           </a:p>
